--- a/Process Book/Process Book.pptx
+++ b/Process Book/Process Book.pptx
@@ -5,8 +5,10 @@
     <p:sldMasterId id="2147483648" r:id="rId1"/>
   </p:sldMasterIdLst>
   <p:sldIdLst>
-    <p:sldId id="258" r:id="rId2"/>
-    <p:sldId id="257" r:id="rId3"/>
+    <p:sldId id="259" r:id="rId2"/>
+    <p:sldId id="258" r:id="rId3"/>
+    <p:sldId id="260" r:id="rId4"/>
+    <p:sldId id="257" r:id="rId5"/>
   </p:sldIdLst>
   <p:sldSz cx="12192000" cy="6858000"/>
   <p:notesSz cx="6858000" cy="9144000"/>
@@ -105,6 +107,11 @@
       </a:defRPr>
     </a:lvl9pPr>
   </p:defaultTextStyle>
+  <p:extLst>
+    <p:ext uri="{EFAFB233-063F-42B5-8137-9DF3F51BA10A}">
+      <p15:sldGuideLst xmlns:p15="http://schemas.microsoft.com/office/powerpoint/2012/main"/>
+    </p:ext>
+  </p:extLst>
 </p:presentation>
 </file>
 
@@ -3322,12 +3329,47 @@
           <a:chExt cx="0" cy="0"/>
         </a:xfrm>
       </p:grpSpPr>
+      <p:sp>
+        <p:nvSpPr>
+          <p:cNvPr id="2" name="TextBox 1">
+            <a:extLst>
+              <a:ext uri="{FF2B5EF4-FFF2-40B4-BE49-F238E27FC236}">
+                <a16:creationId xmlns:a16="http://schemas.microsoft.com/office/drawing/2014/main" id="{D6980047-238C-C938-892C-99FF83D50249}"/>
+              </a:ext>
+            </a:extLst>
+          </p:cNvPr>
+          <p:cNvSpPr txBox="1"/>
+          <p:nvPr/>
+        </p:nvSpPr>
+        <p:spPr>
+          <a:xfrm>
+            <a:off x="183706" y="152574"/>
+            <a:ext cx="1692964" cy="369332"/>
+          </a:xfrm>
+          <a:prstGeom prst="rect">
+            <a:avLst/>
+          </a:prstGeom>
+          <a:noFill/>
+        </p:spPr>
+        <p:txBody>
+          <a:bodyPr wrap="none" rtlCol="0">
+            <a:spAutoFit/>
+          </a:bodyPr>
+          <a:lstStyle/>
+          <a:p>
+            <a:r>
+              <a:rPr lang="en-US" b="1" dirty="0"/>
+              <a:t>Overall Layout</a:t>
+            </a:r>
+          </a:p>
+        </p:txBody>
+      </p:sp>
       <p:pic>
         <p:nvPicPr>
-          <p:cNvPr id="3" name="Picture 2">
-            <a:extLst>
-              <a:ext uri="{FF2B5EF4-FFF2-40B4-BE49-F238E27FC236}">
-                <a16:creationId xmlns:a16="http://schemas.microsoft.com/office/drawing/2014/main" id="{6021D18C-4732-F8B4-860C-59CBA7EC6463}"/>
+          <p:cNvPr id="6" name="Picture 5">
+            <a:extLst>
+              <a:ext uri="{FF2B5EF4-FFF2-40B4-BE49-F238E27FC236}">
+                <a16:creationId xmlns:a16="http://schemas.microsoft.com/office/drawing/2014/main" id="{26012C3E-D936-C191-4231-BECB46CF381A}"/>
               </a:ext>
             </a:extLst>
           </p:cNvPr>
@@ -3344,7 +3386,161 @@
         </p:blipFill>
         <p:spPr>
           <a:xfrm>
-            <a:off x="183706" y="2313562"/>
+            <a:off x="1030188" y="1543579"/>
+            <a:ext cx="9604201" cy="4539298"/>
+          </a:xfrm>
+          <a:prstGeom prst="rect">
+            <a:avLst/>
+          </a:prstGeom>
+        </p:spPr>
+      </p:pic>
+      <p:sp>
+        <p:nvSpPr>
+          <p:cNvPr id="7" name="TextBox 6">
+            <a:extLst>
+              <a:ext uri="{FF2B5EF4-FFF2-40B4-BE49-F238E27FC236}">
+                <a16:creationId xmlns:a16="http://schemas.microsoft.com/office/drawing/2014/main" id="{0B75BC13-CA36-9A38-83B8-CD6DB02A5D0E}"/>
+              </a:ext>
+            </a:extLst>
+          </p:cNvPr>
+          <p:cNvSpPr txBox="1"/>
+          <p:nvPr/>
+        </p:nvSpPr>
+        <p:spPr>
+          <a:xfrm>
+            <a:off x="302642" y="775123"/>
+            <a:ext cx="8186450" cy="646331"/>
+          </a:xfrm>
+          <a:prstGeom prst="rect">
+            <a:avLst/>
+          </a:prstGeom>
+          <a:noFill/>
+        </p:spPr>
+        <p:txBody>
+          <a:bodyPr wrap="square" rtlCol="0">
+            <a:spAutoFit/>
+          </a:bodyPr>
+          <a:lstStyle/>
+          <a:p>
+            <a:pPr marL="285750" indent="-285750">
+              <a:buFontTx/>
+              <a:buChar char="-"/>
+            </a:pPr>
+            <a:r>
+              <a:rPr lang="en-US" dirty="0"/>
+              <a:t>Single Page: slow loading speed &amp; hard to navigate</a:t>
+            </a:r>
+            <a:endParaRPr lang="en-US" altLang="zh-CN" dirty="0"/>
+          </a:p>
+          <a:p>
+            <a:pPr marL="285750" indent="-285750">
+              <a:buFontTx/>
+              <a:buChar char="-"/>
+            </a:pPr>
+            <a:r>
+              <a:rPr lang="en-US" dirty="0"/>
+              <a:t>Navigation bar on the left: Leave narrow spaces for the contents</a:t>
+            </a:r>
+          </a:p>
+        </p:txBody>
+      </p:sp>
+      <p:cxnSp>
+        <p:nvCxnSpPr>
+          <p:cNvPr id="8" name="Straight Arrow Connector 7">
+            <a:extLst>
+              <a:ext uri="{FF2B5EF4-FFF2-40B4-BE49-F238E27FC236}">
+                <a16:creationId xmlns:a16="http://schemas.microsoft.com/office/drawing/2014/main" id="{8DCEFD9B-4FE7-C94F-E9D0-CCAA8AF89E13}"/>
+              </a:ext>
+            </a:extLst>
+          </p:cNvPr>
+          <p:cNvCxnSpPr>
+            <a:cxnSpLocks/>
+          </p:cNvCxnSpPr>
+          <p:nvPr/>
+        </p:nvCxnSpPr>
+        <p:spPr>
+          <a:xfrm>
+            <a:off x="509286" y="6419813"/>
+            <a:ext cx="11320041" cy="0"/>
+          </a:xfrm>
+          <a:prstGeom prst="straightConnector1">
+            <a:avLst/>
+          </a:prstGeom>
+          <a:ln w="38100">
+            <a:solidFill>
+              <a:schemeClr val="tx1"/>
+            </a:solidFill>
+            <a:tailEnd type="triangle" w="lg" len="lg"/>
+          </a:ln>
+        </p:spPr>
+        <p:style>
+          <a:lnRef idx="2">
+            <a:schemeClr val="accent1"/>
+          </a:lnRef>
+          <a:fillRef idx="0">
+            <a:schemeClr val="accent1"/>
+          </a:fillRef>
+          <a:effectRef idx="1">
+            <a:schemeClr val="accent1"/>
+          </a:effectRef>
+          <a:fontRef idx="minor">
+            <a:schemeClr val="tx1"/>
+          </a:fontRef>
+        </p:style>
+      </p:cxnSp>
+    </p:spTree>
+    <p:extLst>
+      <p:ext uri="{BB962C8B-B14F-4D97-AF65-F5344CB8AC3E}">
+        <p14:creationId xmlns:p14="http://schemas.microsoft.com/office/powerpoint/2010/main" val="2438163324"/>
+      </p:ext>
+    </p:extLst>
+  </p:cSld>
+  <p:clrMapOvr>
+    <a:masterClrMapping/>
+  </p:clrMapOvr>
+</p:sld>
+</file>
+
+<file path=ppt/slides/slide2.xml><?xml version="1.0" encoding="utf-8"?>
+<p:sld xmlns:a="http://schemas.openxmlformats.org/drawingml/2006/main" xmlns:r="http://schemas.openxmlformats.org/officeDocument/2006/relationships" xmlns:p="http://schemas.openxmlformats.org/presentationml/2006/main">
+  <p:cSld>
+    <p:spTree>
+      <p:nvGrpSpPr>
+        <p:cNvPr id="1" name=""/>
+        <p:cNvGrpSpPr/>
+        <p:nvPr/>
+      </p:nvGrpSpPr>
+      <p:grpSpPr>
+        <a:xfrm>
+          <a:off x="0" y="0"/>
+          <a:ext cx="0" cy="0"/>
+          <a:chOff x="0" y="0"/>
+          <a:chExt cx="0" cy="0"/>
+        </a:xfrm>
+      </p:grpSpPr>
+      <p:pic>
+        <p:nvPicPr>
+          <p:cNvPr id="3" name="Picture 2">
+            <a:extLst>
+              <a:ext uri="{FF2B5EF4-FFF2-40B4-BE49-F238E27FC236}">
+                <a16:creationId xmlns:a16="http://schemas.microsoft.com/office/drawing/2014/main" id="{6021D18C-4732-F8B4-860C-59CBA7EC6463}"/>
+              </a:ext>
+            </a:extLst>
+          </p:cNvPr>
+          <p:cNvPicPr>
+            <a:picLocks noChangeAspect="1"/>
+          </p:cNvPicPr>
+          <p:nvPr/>
+        </p:nvPicPr>
+        <p:blipFill>
+          <a:blip r:embed="rId2"/>
+          <a:stretch>
+            <a:fillRect/>
+          </a:stretch>
+        </p:blipFill>
+        <p:spPr>
+          <a:xfrm>
+            <a:off x="183706" y="1905451"/>
             <a:ext cx="5239515" cy="3929636"/>
           </a:xfrm>
           <a:prstGeom prst="rect">
@@ -3375,7 +3571,7 @@
         </p:blipFill>
         <p:spPr>
           <a:xfrm>
-            <a:off x="5121357" y="1905452"/>
+            <a:off x="5121357" y="1584177"/>
             <a:ext cx="6886937" cy="3929635"/>
           </a:xfrm>
           <a:prstGeom prst="rect">
@@ -3475,12 +3671,18 @@
 </p:sld>
 </file>
 
-<file path=ppt/slides/slide2.xml><?xml version="1.0" encoding="utf-8"?>
+<file path=ppt/slides/slide3.xml><?xml version="1.0" encoding="utf-8"?>
 <p:sld xmlns:a="http://schemas.openxmlformats.org/drawingml/2006/main" xmlns:r="http://schemas.openxmlformats.org/officeDocument/2006/relationships" xmlns:p="http://schemas.openxmlformats.org/presentationml/2006/main">
   <p:cSld>
     <p:spTree>
       <p:nvGrpSpPr>
-        <p:cNvPr id="1" name=""/>
+        <p:cNvPr id="1" name="">
+          <a:extLst>
+            <a:ext uri="{FF2B5EF4-FFF2-40B4-BE49-F238E27FC236}">
+              <a16:creationId xmlns:a16="http://schemas.microsoft.com/office/drawing/2014/main" id="{DF083237-212F-DA8C-EF27-EF910CAF04AD}"/>
+            </a:ext>
+          </a:extLst>
+        </p:cNvPr>
         <p:cNvGrpSpPr/>
         <p:nvPr/>
       </p:nvGrpSpPr>
@@ -3492,12 +3694,47 @@
           <a:chExt cx="0" cy="0"/>
         </a:xfrm>
       </p:grpSpPr>
+      <p:sp>
+        <p:nvSpPr>
+          <p:cNvPr id="2" name="TextBox 1">
+            <a:extLst>
+              <a:ext uri="{FF2B5EF4-FFF2-40B4-BE49-F238E27FC236}">
+                <a16:creationId xmlns:a16="http://schemas.microsoft.com/office/drawing/2014/main" id="{EDB0B177-F60D-8C93-65A9-79F0425020A7}"/>
+              </a:ext>
+            </a:extLst>
+          </p:cNvPr>
+          <p:cNvSpPr txBox="1"/>
+          <p:nvPr/>
+        </p:nvSpPr>
+        <p:spPr>
+          <a:xfrm>
+            <a:off x="183706" y="152574"/>
+            <a:ext cx="3691075" cy="369332"/>
+          </a:xfrm>
+          <a:prstGeom prst="rect">
+            <a:avLst/>
+          </a:prstGeom>
+          <a:noFill/>
+        </p:spPr>
+        <p:txBody>
+          <a:bodyPr wrap="none" rtlCol="0">
+            <a:spAutoFit/>
+          </a:bodyPr>
+          <a:lstStyle/>
+          <a:p>
+            <a:r>
+              <a:rPr lang="en-US" b="1" dirty="0"/>
+              <a:t>Unique Phrases of media clusters</a:t>
+            </a:r>
+          </a:p>
+        </p:txBody>
+      </p:sp>
       <p:pic>
         <p:nvPicPr>
-          <p:cNvPr id="2" name="Picture 1">
-            <a:extLst>
-              <a:ext uri="{FF2B5EF4-FFF2-40B4-BE49-F238E27FC236}">
-                <a16:creationId xmlns:a16="http://schemas.microsoft.com/office/drawing/2014/main" id="{B69D37D1-E544-E710-8D0A-A604034A9B9C}"/>
+          <p:cNvPr id="4" name="Picture 3">
+            <a:extLst>
+              <a:ext uri="{FF2B5EF4-FFF2-40B4-BE49-F238E27FC236}">
+                <a16:creationId xmlns:a16="http://schemas.microsoft.com/office/drawing/2014/main" id="{94E9658F-3A7F-2D46-F790-F08C7AF59C39}"/>
               </a:ext>
             </a:extLst>
           </p:cNvPr>
@@ -3514,92 +3751,30 @@
         </p:blipFill>
         <p:spPr>
           <a:xfrm>
-            <a:off x="302643" y="3429000"/>
-            <a:ext cx="3952907" cy="1689867"/>
+            <a:off x="302642" y="2623776"/>
+            <a:ext cx="6845300" cy="3644900"/>
           </a:xfrm>
           <a:prstGeom prst="rect">
             <a:avLst/>
           </a:prstGeom>
         </p:spPr>
       </p:pic>
-      <p:pic>
-        <p:nvPicPr>
-          <p:cNvPr id="3" name="Picture 2">
-            <a:extLst>
-              <a:ext uri="{FF2B5EF4-FFF2-40B4-BE49-F238E27FC236}">
-                <a16:creationId xmlns:a16="http://schemas.microsoft.com/office/drawing/2014/main" id="{216F4F27-E81E-0182-9ECB-72A1FD3DAC19}"/>
-              </a:ext>
-            </a:extLst>
-          </p:cNvPr>
-          <p:cNvPicPr>
-            <a:picLocks noChangeAspect="1"/>
-          </p:cNvPicPr>
+      <p:sp>
+        <p:nvSpPr>
+          <p:cNvPr id="3" name="TextBox 2">
+            <a:extLst>
+              <a:ext uri="{FF2B5EF4-FFF2-40B4-BE49-F238E27FC236}">
+                <a16:creationId xmlns:a16="http://schemas.microsoft.com/office/drawing/2014/main" id="{881E12FF-808B-7A95-8217-9FB873EDBB75}"/>
+              </a:ext>
+            </a:extLst>
+          </p:cNvPr>
+          <p:cNvSpPr txBox="1"/>
           <p:nvPr/>
-        </p:nvPicPr>
-        <p:blipFill>
-          <a:blip r:embed="rId3"/>
-          <a:srcRect l="7259" t="35864" r="27524"/>
-          <a:stretch>
-            <a:fillRect/>
-          </a:stretch>
-        </p:blipFill>
+        </p:nvSpPr>
         <p:spPr>
           <a:xfrm>
-            <a:off x="4255550" y="2645600"/>
-            <a:ext cx="3770851" cy="3216977"/>
-          </a:xfrm>
-          <a:prstGeom prst="rect">
-            <a:avLst/>
-          </a:prstGeom>
-        </p:spPr>
-      </p:pic>
-      <p:pic>
-        <p:nvPicPr>
-          <p:cNvPr id="4" name="Picture 3">
-            <a:extLst>
-              <a:ext uri="{FF2B5EF4-FFF2-40B4-BE49-F238E27FC236}">
-                <a16:creationId xmlns:a16="http://schemas.microsoft.com/office/drawing/2014/main" id="{EDB27330-166D-4CDC-D59D-74688D3D4AC1}"/>
-              </a:ext>
-            </a:extLst>
-          </p:cNvPr>
-          <p:cNvPicPr>
-            <a:picLocks noChangeAspect="1"/>
-          </p:cNvPicPr>
-          <p:nvPr/>
-        </p:nvPicPr>
-        <p:blipFill>
-          <a:blip r:embed="rId4"/>
-          <a:srcRect l="3213" t="4403" r="7075"/>
-          <a:stretch>
-            <a:fillRect/>
-          </a:stretch>
-        </p:blipFill>
-        <p:spPr>
-          <a:xfrm>
-            <a:off x="8080425" y="2645600"/>
-            <a:ext cx="3898883" cy="3635317"/>
-          </a:xfrm>
-          <a:prstGeom prst="rect">
-            <a:avLst/>
-          </a:prstGeom>
-        </p:spPr>
-      </p:pic>
-      <p:sp>
-        <p:nvSpPr>
-          <p:cNvPr id="5" name="TextBox 4">
-            <a:extLst>
-              <a:ext uri="{FF2B5EF4-FFF2-40B4-BE49-F238E27FC236}">
-                <a16:creationId xmlns:a16="http://schemas.microsoft.com/office/drawing/2014/main" id="{28EF982E-BF93-1EA4-A8B5-12AC15F621FF}"/>
-              </a:ext>
-            </a:extLst>
-          </p:cNvPr>
-          <p:cNvSpPr txBox="1"/>
-          <p:nvPr/>
-        </p:nvSpPr>
-        <p:spPr>
-          <a:xfrm>
-            <a:off x="183706" y="152574"/>
-            <a:ext cx="4540667" cy="369332"/>
+            <a:off x="302642" y="775123"/>
+            <a:ext cx="5793358" cy="1754326"/>
           </a:xfrm>
           <a:prstGeom prst="rect">
             <a:avLst/>
@@ -3607,24 +3782,70 @@
           <a:noFill/>
         </p:spPr>
         <p:txBody>
-          <a:bodyPr wrap="none" rtlCol="0">
+          <a:bodyPr wrap="square" rtlCol="0">
             <a:spAutoFit/>
           </a:bodyPr>
           <a:lstStyle/>
           <a:p>
             <a:r>
               <a:rPr lang="en-US" b="1" dirty="0"/>
-              <a:t>Heatmap: framing scores across 5 outlets</a:t>
-            </a:r>
-          </a:p>
-        </p:txBody>
-      </p:sp>
-      <p:sp>
-        <p:nvSpPr>
-          <p:cNvPr id="6" name="TextBox 5">
-            <a:extLst>
-              <a:ext uri="{FF2B5EF4-FFF2-40B4-BE49-F238E27FC236}">
-                <a16:creationId xmlns:a16="http://schemas.microsoft.com/office/drawing/2014/main" id="{A3EFCD08-C301-8770-1D7E-6CDC4D4E695B}"/>
+              <a:t>Graph Choices: </a:t>
+            </a:r>
+          </a:p>
+          <a:p>
+            <a:pPr marL="285750" indent="-285750">
+              <a:buFontTx/>
+              <a:buChar char="-"/>
+            </a:pPr>
+            <a:r>
+              <a:rPr lang="en-US" dirty="0"/>
+              <a:t>Word cloud: visually attractive, but hard to compare.</a:t>
+            </a:r>
+          </a:p>
+          <a:p>
+            <a:pPr marL="285750" indent="-285750">
+              <a:buFontTx/>
+              <a:buChar char="-"/>
+            </a:pPr>
+            <a:r>
+              <a:rPr lang="en-US" dirty="0"/>
+              <a:t>Grouped bar chart: too crowded.</a:t>
+            </a:r>
+          </a:p>
+          <a:p>
+            <a:pPr marL="285750" indent="-285750">
+              <a:buFontTx/>
+              <a:buChar char="-"/>
+            </a:pPr>
+            <a:r>
+              <a:rPr lang="en-US" dirty="0"/>
+              <a:t>Faceted bar charts: better </a:t>
+            </a:r>
+            <a:r>
+              <a:rPr lang="en-US" dirty="0" err="1"/>
+              <a:t>readibility</a:t>
+            </a:r>
+            <a:r>
+              <a:rPr lang="en-US" dirty="0"/>
+              <a:t> and easier to compare.</a:t>
+            </a:r>
+            <a:endParaRPr lang="en-US" altLang="zh-CN" dirty="0"/>
+          </a:p>
+          <a:p>
+            <a:pPr marL="285750" indent="-285750">
+              <a:buFontTx/>
+              <a:buChar char="-"/>
+            </a:pPr>
+            <a:endParaRPr lang="en-US" dirty="0"/>
+          </a:p>
+        </p:txBody>
+      </p:sp>
+      <p:sp>
+        <p:nvSpPr>
+          <p:cNvPr id="5" name="TextBox 4">
+            <a:extLst>
+              <a:ext uri="{FF2B5EF4-FFF2-40B4-BE49-F238E27FC236}">
+                <a16:creationId xmlns:a16="http://schemas.microsoft.com/office/drawing/2014/main" id="{78E27084-9731-FB62-F2B1-EF78BDB521BF}"/>
               </a:ext>
             </a:extLst>
           </p:cNvPr>
@@ -3633,8 +3854,8 @@
         </p:nvSpPr>
         <p:spPr>
           <a:xfrm>
-            <a:off x="302642" y="775123"/>
-            <a:ext cx="6144457" cy="1477328"/>
+            <a:off x="6808573" y="775123"/>
+            <a:ext cx="4981931" cy="1477328"/>
           </a:xfrm>
           <a:prstGeom prst="rect">
             <a:avLst/>
@@ -3648,8 +3869,8 @@
           <a:lstStyle/>
           <a:p>
             <a:r>
-              <a:rPr lang="en-US" dirty="0"/>
-              <a:t>Color Scheme Choice: </a:t>
+              <a:rPr lang="en-US" b="1" dirty="0"/>
+              <a:t>Phrase Choice: </a:t>
             </a:r>
           </a:p>
           <a:p>
@@ -3659,45 +3880,17 @@
             </a:pPr>
             <a:r>
               <a:rPr lang="en-US" dirty="0"/>
-              <a:t>Blues scheme: too</a:t>
-            </a:r>
-            <a:r>
-              <a:rPr lang="zh-CN" altLang="en-US" dirty="0"/>
-              <a:t> </a:t>
-            </a:r>
-            <a:r>
-              <a:rPr lang="en-US" altLang="zh-CN" dirty="0"/>
-              <a:t>visually strong compared to other visualizations.</a:t>
-            </a:r>
-          </a:p>
-          <a:p>
-            <a:pPr marL="285750" indent="-285750">
-              <a:buFontTx/>
-              <a:buChar char="-"/>
-            </a:pPr>
-            <a:r>
-              <a:rPr lang="en-US" dirty="0"/>
-              <a:t>Greys scheme: Less distracting, but felt strange.</a:t>
-            </a:r>
-          </a:p>
-          <a:p>
-            <a:pPr marL="285750" indent="-285750">
-              <a:buFontTx/>
-              <a:buChar char="-"/>
-            </a:pPr>
-            <a:r>
-              <a:rPr lang="en-US" dirty="0"/>
-              <a:t>Muted Blues: more consistent with the overall visual style.</a:t>
+              <a:t>At first, we tried to create plots with unique words, but there are too many meaningless words, so we switched to bigrams to make results more interpretable.</a:t>
             </a:r>
           </a:p>
         </p:txBody>
       </p:sp>
       <p:cxnSp>
         <p:nvCxnSpPr>
-          <p:cNvPr id="9" name="Straight Arrow Connector 8">
-            <a:extLst>
-              <a:ext uri="{FF2B5EF4-FFF2-40B4-BE49-F238E27FC236}">
-                <a16:creationId xmlns:a16="http://schemas.microsoft.com/office/drawing/2014/main" id="{02D5B5A7-7B2F-D673-9B98-88089A1F482A}"/>
+          <p:cNvPr id="6" name="Straight Arrow Connector 5">
+            <a:extLst>
+              <a:ext uri="{FF2B5EF4-FFF2-40B4-BE49-F238E27FC236}">
+                <a16:creationId xmlns:a16="http://schemas.microsoft.com/office/drawing/2014/main" id="{E67D938B-A104-3C4E-5318-4979F72432C8}"/>
               </a:ext>
             </a:extLst>
           </p:cNvPr>
@@ -3736,6 +3929,314 @@
           </a:fontRef>
         </p:style>
       </p:cxnSp>
+      <p:pic>
+        <p:nvPicPr>
+          <p:cNvPr id="7" name="Picture 6">
+            <a:extLst>
+              <a:ext uri="{FF2B5EF4-FFF2-40B4-BE49-F238E27FC236}">
+                <a16:creationId xmlns:a16="http://schemas.microsoft.com/office/drawing/2014/main" id="{5C4D9C51-527D-2DF7-372C-B80AEF413A9E}"/>
+              </a:ext>
+            </a:extLst>
+          </p:cNvPr>
+          <p:cNvPicPr>
+            <a:picLocks noChangeAspect="1"/>
+          </p:cNvPicPr>
+          <p:nvPr/>
+        </p:nvPicPr>
+        <p:blipFill>
+          <a:blip r:embed="rId3"/>
+          <a:stretch>
+            <a:fillRect/>
+          </a:stretch>
+        </p:blipFill>
+        <p:spPr>
+          <a:xfrm>
+            <a:off x="7147942" y="2818355"/>
+            <a:ext cx="4534917" cy="3255742"/>
+          </a:xfrm>
+          <a:prstGeom prst="rect">
+            <a:avLst/>
+          </a:prstGeom>
+        </p:spPr>
+      </p:pic>
+    </p:spTree>
+    <p:extLst>
+      <p:ext uri="{BB962C8B-B14F-4D97-AF65-F5344CB8AC3E}">
+        <p14:creationId xmlns:p14="http://schemas.microsoft.com/office/powerpoint/2010/main" val="1723136072"/>
+      </p:ext>
+    </p:extLst>
+  </p:cSld>
+  <p:clrMapOvr>
+    <a:masterClrMapping/>
+  </p:clrMapOvr>
+</p:sld>
+</file>
+
+<file path=ppt/slides/slide4.xml><?xml version="1.0" encoding="utf-8"?>
+<p:sld xmlns:a="http://schemas.openxmlformats.org/drawingml/2006/main" xmlns:r="http://schemas.openxmlformats.org/officeDocument/2006/relationships" xmlns:p="http://schemas.openxmlformats.org/presentationml/2006/main">
+  <p:cSld>
+    <p:spTree>
+      <p:nvGrpSpPr>
+        <p:cNvPr id="1" name=""/>
+        <p:cNvGrpSpPr/>
+        <p:nvPr/>
+      </p:nvGrpSpPr>
+      <p:grpSpPr>
+        <a:xfrm>
+          <a:off x="0" y="0"/>
+          <a:ext cx="0" cy="0"/>
+          <a:chOff x="0" y="0"/>
+          <a:chExt cx="0" cy="0"/>
+        </a:xfrm>
+      </p:grpSpPr>
+      <p:pic>
+        <p:nvPicPr>
+          <p:cNvPr id="2" name="Picture 1">
+            <a:extLst>
+              <a:ext uri="{FF2B5EF4-FFF2-40B4-BE49-F238E27FC236}">
+                <a16:creationId xmlns:a16="http://schemas.microsoft.com/office/drawing/2014/main" id="{B69D37D1-E544-E710-8D0A-A604034A9B9C}"/>
+              </a:ext>
+            </a:extLst>
+          </p:cNvPr>
+          <p:cNvPicPr>
+            <a:picLocks noChangeAspect="1"/>
+          </p:cNvPicPr>
+          <p:nvPr/>
+        </p:nvPicPr>
+        <p:blipFill>
+          <a:blip r:embed="rId2"/>
+          <a:stretch>
+            <a:fillRect/>
+          </a:stretch>
+        </p:blipFill>
+        <p:spPr>
+          <a:xfrm>
+            <a:off x="302643" y="3429000"/>
+            <a:ext cx="3952907" cy="1689867"/>
+          </a:xfrm>
+          <a:prstGeom prst="rect">
+            <a:avLst/>
+          </a:prstGeom>
+        </p:spPr>
+      </p:pic>
+      <p:pic>
+        <p:nvPicPr>
+          <p:cNvPr id="3" name="Picture 2">
+            <a:extLst>
+              <a:ext uri="{FF2B5EF4-FFF2-40B4-BE49-F238E27FC236}">
+                <a16:creationId xmlns:a16="http://schemas.microsoft.com/office/drawing/2014/main" id="{216F4F27-E81E-0182-9ECB-72A1FD3DAC19}"/>
+              </a:ext>
+            </a:extLst>
+          </p:cNvPr>
+          <p:cNvPicPr>
+            <a:picLocks noChangeAspect="1"/>
+          </p:cNvPicPr>
+          <p:nvPr/>
+        </p:nvPicPr>
+        <p:blipFill>
+          <a:blip r:embed="rId3"/>
+          <a:srcRect l="7259" t="35864" r="27524"/>
+          <a:stretch>
+            <a:fillRect/>
+          </a:stretch>
+        </p:blipFill>
+        <p:spPr>
+          <a:xfrm>
+            <a:off x="4255550" y="2645600"/>
+            <a:ext cx="3770851" cy="3216977"/>
+          </a:xfrm>
+          <a:prstGeom prst="rect">
+            <a:avLst/>
+          </a:prstGeom>
+        </p:spPr>
+      </p:pic>
+      <p:pic>
+        <p:nvPicPr>
+          <p:cNvPr id="4" name="Picture 3">
+            <a:extLst>
+              <a:ext uri="{FF2B5EF4-FFF2-40B4-BE49-F238E27FC236}">
+                <a16:creationId xmlns:a16="http://schemas.microsoft.com/office/drawing/2014/main" id="{EDB27330-166D-4CDC-D59D-74688D3D4AC1}"/>
+              </a:ext>
+            </a:extLst>
+          </p:cNvPr>
+          <p:cNvPicPr>
+            <a:picLocks noChangeAspect="1"/>
+          </p:cNvPicPr>
+          <p:nvPr/>
+        </p:nvPicPr>
+        <p:blipFill>
+          <a:blip r:embed="rId4"/>
+          <a:srcRect l="3213" t="4403" r="7075"/>
+          <a:stretch>
+            <a:fillRect/>
+          </a:stretch>
+        </p:blipFill>
+        <p:spPr>
+          <a:xfrm>
+            <a:off x="8080425" y="2645600"/>
+            <a:ext cx="3898883" cy="3635317"/>
+          </a:xfrm>
+          <a:prstGeom prst="rect">
+            <a:avLst/>
+          </a:prstGeom>
+        </p:spPr>
+      </p:pic>
+      <p:sp>
+        <p:nvSpPr>
+          <p:cNvPr id="5" name="TextBox 4">
+            <a:extLst>
+              <a:ext uri="{FF2B5EF4-FFF2-40B4-BE49-F238E27FC236}">
+                <a16:creationId xmlns:a16="http://schemas.microsoft.com/office/drawing/2014/main" id="{28EF982E-BF93-1EA4-A8B5-12AC15F621FF}"/>
+              </a:ext>
+            </a:extLst>
+          </p:cNvPr>
+          <p:cNvSpPr txBox="1"/>
+          <p:nvPr/>
+        </p:nvSpPr>
+        <p:spPr>
+          <a:xfrm>
+            <a:off x="183706" y="152574"/>
+            <a:ext cx="4540667" cy="369332"/>
+          </a:xfrm>
+          <a:prstGeom prst="rect">
+            <a:avLst/>
+          </a:prstGeom>
+          <a:noFill/>
+        </p:spPr>
+        <p:txBody>
+          <a:bodyPr wrap="none" rtlCol="0">
+            <a:spAutoFit/>
+          </a:bodyPr>
+          <a:lstStyle/>
+          <a:p>
+            <a:r>
+              <a:rPr lang="en-US" b="1" dirty="0"/>
+              <a:t>Heatmap: framing scores across 5 outlets</a:t>
+            </a:r>
+          </a:p>
+        </p:txBody>
+      </p:sp>
+      <p:sp>
+        <p:nvSpPr>
+          <p:cNvPr id="6" name="TextBox 5">
+            <a:extLst>
+              <a:ext uri="{FF2B5EF4-FFF2-40B4-BE49-F238E27FC236}">
+                <a16:creationId xmlns:a16="http://schemas.microsoft.com/office/drawing/2014/main" id="{A3EFCD08-C301-8770-1D7E-6CDC4D4E695B}"/>
+              </a:ext>
+            </a:extLst>
+          </p:cNvPr>
+          <p:cNvSpPr txBox="1"/>
+          <p:nvPr/>
+        </p:nvSpPr>
+        <p:spPr>
+          <a:xfrm>
+            <a:off x="302642" y="775123"/>
+            <a:ext cx="6144457" cy="1477328"/>
+          </a:xfrm>
+          <a:prstGeom prst="rect">
+            <a:avLst/>
+          </a:prstGeom>
+          <a:noFill/>
+        </p:spPr>
+        <p:txBody>
+          <a:bodyPr wrap="square" rtlCol="0">
+            <a:spAutoFit/>
+          </a:bodyPr>
+          <a:lstStyle/>
+          <a:p>
+            <a:r>
+              <a:rPr lang="en-US" b="1" dirty="0"/>
+              <a:t>Color Scheme Choice</a:t>
+            </a:r>
+            <a:r>
+              <a:rPr lang="en-US" dirty="0"/>
+              <a:t>: </a:t>
+            </a:r>
+          </a:p>
+          <a:p>
+            <a:pPr marL="285750" indent="-285750">
+              <a:buFontTx/>
+              <a:buChar char="-"/>
+            </a:pPr>
+            <a:r>
+              <a:rPr lang="en-US" dirty="0"/>
+              <a:t>Blues scheme: too</a:t>
+            </a:r>
+            <a:r>
+              <a:rPr lang="zh-CN" altLang="en-US" dirty="0"/>
+              <a:t> </a:t>
+            </a:r>
+            <a:r>
+              <a:rPr lang="en-US" altLang="zh-CN" dirty="0"/>
+              <a:t>visually strong compared to other visualizations.</a:t>
+            </a:r>
+          </a:p>
+          <a:p>
+            <a:pPr marL="285750" indent="-285750">
+              <a:buFontTx/>
+              <a:buChar char="-"/>
+            </a:pPr>
+            <a:r>
+              <a:rPr lang="en-US" dirty="0"/>
+              <a:t>Greys scheme: Less distracting, but felt strange.</a:t>
+            </a:r>
+          </a:p>
+          <a:p>
+            <a:pPr marL="285750" indent="-285750">
+              <a:buFontTx/>
+              <a:buChar char="-"/>
+            </a:pPr>
+            <a:r>
+              <a:rPr lang="en-US" dirty="0"/>
+              <a:t>Muted Blues: more consistent with the overall visual style.</a:t>
+            </a:r>
+          </a:p>
+        </p:txBody>
+      </p:sp>
+      <p:cxnSp>
+        <p:nvCxnSpPr>
+          <p:cNvPr id="9" name="Straight Arrow Connector 8">
+            <a:extLst>
+              <a:ext uri="{FF2B5EF4-FFF2-40B4-BE49-F238E27FC236}">
+                <a16:creationId xmlns:a16="http://schemas.microsoft.com/office/drawing/2014/main" id="{02D5B5A7-7B2F-D673-9B98-88089A1F482A}"/>
+              </a:ext>
+            </a:extLst>
+          </p:cNvPr>
+          <p:cNvCxnSpPr>
+            <a:cxnSpLocks/>
+          </p:cNvCxnSpPr>
+          <p:nvPr/>
+        </p:nvCxnSpPr>
+        <p:spPr>
+          <a:xfrm>
+            <a:off x="509286" y="6419813"/>
+            <a:ext cx="11320041" cy="0"/>
+          </a:xfrm>
+          <a:prstGeom prst="straightConnector1">
+            <a:avLst/>
+          </a:prstGeom>
+          <a:ln w="38100">
+            <a:solidFill>
+              <a:schemeClr val="tx1"/>
+            </a:solidFill>
+            <a:tailEnd type="triangle" w="lg" len="lg"/>
+          </a:ln>
+        </p:spPr>
+        <p:style>
+          <a:lnRef idx="2">
+            <a:schemeClr val="accent1"/>
+          </a:lnRef>
+          <a:fillRef idx="0">
+            <a:schemeClr val="accent1"/>
+          </a:fillRef>
+          <a:effectRef idx="1">
+            <a:schemeClr val="accent1"/>
+          </a:effectRef>
+          <a:fontRef idx="minor">
+            <a:schemeClr val="tx1"/>
+          </a:fontRef>
+        </p:style>
+      </p:cxnSp>
       <p:sp>
         <p:nvSpPr>
           <p:cNvPr id="13" name="TextBox 12">
@@ -3765,8 +4266,12 @@
           <a:lstStyle/>
           <a:p>
             <a:r>
+              <a:rPr lang="en-US" b="1" dirty="0"/>
+              <a:t>Layout</a:t>
+            </a:r>
+            <a:r>
               <a:rPr lang="en-US" dirty="0"/>
-              <a:t>Layout:</a:t>
+              <a:t>:</a:t>
             </a:r>
           </a:p>
           <a:p>
